--- a/Kurukshetra_2.0_PPT_template.pptx
+++ b/Kurukshetra_2.0_PPT_template.pptx
@@ -3780,58 +3780,6 @@
       </p:sp>
       <p:sp>
         <p:nvSpPr>
-          <p:cNvPr id="16" name="Rectangle 15">
-            <a:extLst>
-              <a:ext uri="{FF2B5EF4-FFF2-40B4-BE49-F238E27FC236}">
-                <a16:creationId xmlns:a16="http://schemas.microsoft.com/office/drawing/2014/main" id="{CC4CD951-50BE-6EE3-5108-9D938F6F9647}"/>
-              </a:ext>
-            </a:extLst>
-          </p:cNvPr>
-          <p:cNvSpPr/>
-          <p:nvPr/>
-        </p:nvSpPr>
-        <p:spPr>
-          <a:xfrm>
-            <a:off x="411480" y="6336792"/>
-            <a:ext cx="11338560" cy="9144"/>
-          </a:xfrm>
-          <a:prstGeom prst="rect">
-            <a:avLst/>
-          </a:prstGeom>
-          <a:solidFill>
-            <a:srgbClr val="8B5B24"/>
-          </a:solidFill>
-          <a:ln>
-            <a:solidFill>
-              <a:srgbClr val="8B5B24"/>
-            </a:solidFill>
-          </a:ln>
-        </p:spPr>
-        <p:style>
-          <a:lnRef idx="1">
-            <a:schemeClr val="accent1"/>
-          </a:lnRef>
-          <a:fillRef idx="3">
-            <a:schemeClr val="accent1"/>
-          </a:fillRef>
-          <a:effectRef idx="2">
-            <a:schemeClr val="accent1"/>
-          </a:effectRef>
-          <a:fontRef idx="minor">
-            <a:schemeClr val="lt1"/>
-          </a:fontRef>
-        </p:style>
-        <p:txBody>
-          <a:bodyPr rtlCol="0" anchor="ctr"/>
-          <a:lstStyle/>
-          <a:p>
-            <a:pPr algn="ctr"/>
-            <a:endParaRPr/>
-          </a:p>
-        </p:txBody>
-      </p:sp>
-      <p:sp>
-        <p:nvSpPr>
           <p:cNvPr id="17" name="Rectangle 16">
             <a:extLst>
               <a:ext uri="{FF2B5EF4-FFF2-40B4-BE49-F238E27FC236}">
@@ -4940,58 +4888,6 @@
               </a:rPr>
               <a:t>MIT ACSC • ALANDI, PUNE</a:t>
             </a:r>
-          </a:p>
-        </p:txBody>
-      </p:sp>
-      <p:sp>
-        <p:nvSpPr>
-          <p:cNvPr id="16" name="Rectangle 15">
-            <a:extLst>
-              <a:ext uri="{FF2B5EF4-FFF2-40B4-BE49-F238E27FC236}">
-                <a16:creationId xmlns:a16="http://schemas.microsoft.com/office/drawing/2014/main" id="{EBEBF1CF-5E91-BCFE-5504-455C1A16AC03}"/>
-              </a:ext>
-            </a:extLst>
-          </p:cNvPr>
-          <p:cNvSpPr/>
-          <p:nvPr/>
-        </p:nvSpPr>
-        <p:spPr>
-          <a:xfrm>
-            <a:off x="411480" y="6336792"/>
-            <a:ext cx="11338560" cy="9144"/>
-          </a:xfrm>
-          <a:prstGeom prst="rect">
-            <a:avLst/>
-          </a:prstGeom>
-          <a:solidFill>
-            <a:srgbClr val="8B5B24"/>
-          </a:solidFill>
-          <a:ln>
-            <a:solidFill>
-              <a:srgbClr val="8B5B24"/>
-            </a:solidFill>
-          </a:ln>
-        </p:spPr>
-        <p:style>
-          <a:lnRef idx="1">
-            <a:schemeClr val="accent1"/>
-          </a:lnRef>
-          <a:fillRef idx="3">
-            <a:schemeClr val="accent1"/>
-          </a:fillRef>
-          <a:effectRef idx="2">
-            <a:schemeClr val="accent1"/>
-          </a:effectRef>
-          <a:fontRef idx="minor">
-            <a:schemeClr val="lt1"/>
-          </a:fontRef>
-        </p:style>
-        <p:txBody>
-          <a:bodyPr rtlCol="0" anchor="ctr"/>
-          <a:lstStyle/>
-          <a:p>
-            <a:pPr algn="ctr"/>
-            <a:endParaRPr/>
           </a:p>
         </p:txBody>
       </p:sp>
@@ -6137,58 +6033,6 @@
       </p:sp>
       <p:sp>
         <p:nvSpPr>
-          <p:cNvPr id="16" name="Rectangle 15">
-            <a:extLst>
-              <a:ext uri="{FF2B5EF4-FFF2-40B4-BE49-F238E27FC236}">
-                <a16:creationId xmlns:a16="http://schemas.microsoft.com/office/drawing/2014/main" id="{BAFCA20A-73DF-21BC-37D7-8ED18B74BE12}"/>
-              </a:ext>
-            </a:extLst>
-          </p:cNvPr>
-          <p:cNvSpPr/>
-          <p:nvPr/>
-        </p:nvSpPr>
-        <p:spPr>
-          <a:xfrm>
-            <a:off x="411480" y="6336792"/>
-            <a:ext cx="11338560" cy="9144"/>
-          </a:xfrm>
-          <a:prstGeom prst="rect">
-            <a:avLst/>
-          </a:prstGeom>
-          <a:solidFill>
-            <a:srgbClr val="8B5B24"/>
-          </a:solidFill>
-          <a:ln>
-            <a:solidFill>
-              <a:srgbClr val="8B5B24"/>
-            </a:solidFill>
-          </a:ln>
-        </p:spPr>
-        <p:style>
-          <a:lnRef idx="1">
-            <a:schemeClr val="accent1"/>
-          </a:lnRef>
-          <a:fillRef idx="3">
-            <a:schemeClr val="accent1"/>
-          </a:fillRef>
-          <a:effectRef idx="2">
-            <a:schemeClr val="accent1"/>
-          </a:effectRef>
-          <a:fontRef idx="minor">
-            <a:schemeClr val="lt1"/>
-          </a:fontRef>
-        </p:style>
-        <p:txBody>
-          <a:bodyPr rtlCol="0" anchor="ctr"/>
-          <a:lstStyle/>
-          <a:p>
-            <a:pPr algn="ctr"/>
-            <a:endParaRPr/>
-          </a:p>
-        </p:txBody>
-      </p:sp>
-      <p:sp>
-        <p:nvSpPr>
           <p:cNvPr id="17" name="Rectangle 16">
             <a:extLst>
               <a:ext uri="{FF2B5EF4-FFF2-40B4-BE49-F238E27FC236}">
@@ -7223,58 +7067,6 @@
       </p:sp>
       <p:sp>
         <p:nvSpPr>
-          <p:cNvPr id="16" name="Rectangle 15">
-            <a:extLst>
-              <a:ext uri="{FF2B5EF4-FFF2-40B4-BE49-F238E27FC236}">
-                <a16:creationId xmlns:a16="http://schemas.microsoft.com/office/drawing/2014/main" id="{51FDBACD-D900-3413-E571-74B4C8C5CCEE}"/>
-              </a:ext>
-            </a:extLst>
-          </p:cNvPr>
-          <p:cNvSpPr/>
-          <p:nvPr/>
-        </p:nvSpPr>
-        <p:spPr>
-          <a:xfrm>
-            <a:off x="411480" y="6336792"/>
-            <a:ext cx="11338560" cy="9144"/>
-          </a:xfrm>
-          <a:prstGeom prst="rect">
-            <a:avLst/>
-          </a:prstGeom>
-          <a:solidFill>
-            <a:srgbClr val="8B5B24"/>
-          </a:solidFill>
-          <a:ln>
-            <a:solidFill>
-              <a:srgbClr val="8B5B24"/>
-            </a:solidFill>
-          </a:ln>
-        </p:spPr>
-        <p:style>
-          <a:lnRef idx="1">
-            <a:schemeClr val="accent1"/>
-          </a:lnRef>
-          <a:fillRef idx="3">
-            <a:schemeClr val="accent1"/>
-          </a:fillRef>
-          <a:effectRef idx="2">
-            <a:schemeClr val="accent1"/>
-          </a:effectRef>
-          <a:fontRef idx="minor">
-            <a:schemeClr val="lt1"/>
-          </a:fontRef>
-        </p:style>
-        <p:txBody>
-          <a:bodyPr rtlCol="0" anchor="ctr"/>
-          <a:lstStyle/>
-          <a:p>
-            <a:pPr algn="ctr"/>
-            <a:endParaRPr/>
-          </a:p>
-        </p:txBody>
-      </p:sp>
-      <p:sp>
-        <p:nvSpPr>
           <p:cNvPr id="17" name="Rectangle 16">
             <a:extLst>
               <a:ext uri="{FF2B5EF4-FFF2-40B4-BE49-F238E27FC236}">
@@ -8345,10 +8137,10 @@
       </p:sp>
       <p:sp>
         <p:nvSpPr>
-          <p:cNvPr id="16" name="Rectangle 15">
-            <a:extLst>
-              <a:ext uri="{FF2B5EF4-FFF2-40B4-BE49-F238E27FC236}">
-                <a16:creationId xmlns:a16="http://schemas.microsoft.com/office/drawing/2014/main" id="{8426B819-3249-A963-ABFE-0C165A6B6AD2}"/>
+          <p:cNvPr id="17" name="Rectangle 16">
+            <a:extLst>
+              <a:ext uri="{FF2B5EF4-FFF2-40B4-BE49-F238E27FC236}">
+                <a16:creationId xmlns:a16="http://schemas.microsoft.com/office/drawing/2014/main" id="{0E6D4819-4F34-CFAE-3981-2FA682DA23E1}"/>
               </a:ext>
             </a:extLst>
           </p:cNvPr>
@@ -8357,18 +8149,18 @@
         </p:nvSpPr>
         <p:spPr>
           <a:xfrm>
-            <a:off x="411480" y="6336792"/>
-            <a:ext cx="11338560" cy="9144"/>
+            <a:off x="19774376" y="0"/>
+            <a:ext cx="4142232" cy="6858000"/>
           </a:xfrm>
           <a:prstGeom prst="rect">
             <a:avLst/>
           </a:prstGeom>
           <a:solidFill>
-            <a:srgbClr val="8B5B24"/>
+            <a:srgbClr val="21110C"/>
           </a:solidFill>
           <a:ln>
             <a:solidFill>
-              <a:srgbClr val="8B5B24"/>
+              <a:srgbClr val="21110C"/>
             </a:solidFill>
           </a:ln>
         </p:spPr>
@@ -8397,58 +8189,6 @@
       </p:sp>
       <p:sp>
         <p:nvSpPr>
-          <p:cNvPr id="17" name="Rectangle 16">
-            <a:extLst>
-              <a:ext uri="{FF2B5EF4-FFF2-40B4-BE49-F238E27FC236}">
-                <a16:creationId xmlns:a16="http://schemas.microsoft.com/office/drawing/2014/main" id="{0E6D4819-4F34-CFAE-3981-2FA682DA23E1}"/>
-              </a:ext>
-            </a:extLst>
-          </p:cNvPr>
-          <p:cNvSpPr/>
-          <p:nvPr/>
-        </p:nvSpPr>
-        <p:spPr>
-          <a:xfrm>
-            <a:off x="19774376" y="0"/>
-            <a:ext cx="4142232" cy="6858000"/>
-          </a:xfrm>
-          <a:prstGeom prst="rect">
-            <a:avLst/>
-          </a:prstGeom>
-          <a:solidFill>
-            <a:srgbClr val="21110C"/>
-          </a:solidFill>
-          <a:ln>
-            <a:solidFill>
-              <a:srgbClr val="21110C"/>
-            </a:solidFill>
-          </a:ln>
-        </p:spPr>
-        <p:style>
-          <a:lnRef idx="1">
-            <a:schemeClr val="accent1"/>
-          </a:lnRef>
-          <a:fillRef idx="3">
-            <a:schemeClr val="accent1"/>
-          </a:fillRef>
-          <a:effectRef idx="2">
-            <a:schemeClr val="accent1"/>
-          </a:effectRef>
-          <a:fontRef idx="minor">
-            <a:schemeClr val="lt1"/>
-          </a:fontRef>
-        </p:style>
-        <p:txBody>
-          <a:bodyPr rtlCol="0" anchor="ctr"/>
-          <a:lstStyle/>
-          <a:p>
-            <a:pPr algn="ctr"/>
-            <a:endParaRPr/>
-          </a:p>
-        </p:txBody>
-      </p:sp>
-      <p:sp>
-        <p:nvSpPr>
           <p:cNvPr id="23" name="TextBox 22">
             <a:extLst>
               <a:ext uri="{FF2B5EF4-FFF2-40B4-BE49-F238E27FC236}">
@@ -8925,7 +8665,7 @@
               </a:rPr>
               <a:t>Provide links to important sources used</a:t>
             </a:r>
-            <a:endParaRPr lang="en-US">
+            <a:endParaRPr lang="en-US" dirty="0">
               <a:ea typeface="Calibri"/>
               <a:cs typeface="Calibri"/>
             </a:endParaRPr>
@@ -9423,58 +9163,6 @@
               </a:rPr>
               <a:t>MIT ACSC • ALANDI, PUNE</a:t>
             </a:r>
-          </a:p>
-        </p:txBody>
-      </p:sp>
-      <p:sp>
-        <p:nvSpPr>
-          <p:cNvPr id="16" name="Rectangle 15">
-            <a:extLst>
-              <a:ext uri="{FF2B5EF4-FFF2-40B4-BE49-F238E27FC236}">
-                <a16:creationId xmlns:a16="http://schemas.microsoft.com/office/drawing/2014/main" id="{00E16188-78B0-0F65-C973-A721A8011EF1}"/>
-              </a:ext>
-            </a:extLst>
-          </p:cNvPr>
-          <p:cNvSpPr/>
-          <p:nvPr/>
-        </p:nvSpPr>
-        <p:spPr>
-          <a:xfrm>
-            <a:off x="411480" y="6336792"/>
-            <a:ext cx="11338560" cy="9144"/>
-          </a:xfrm>
-          <a:prstGeom prst="rect">
-            <a:avLst/>
-          </a:prstGeom>
-          <a:solidFill>
-            <a:srgbClr val="8B5B24"/>
-          </a:solidFill>
-          <a:ln>
-            <a:solidFill>
-              <a:srgbClr val="8B5B24"/>
-            </a:solidFill>
-          </a:ln>
-        </p:spPr>
-        <p:style>
-          <a:lnRef idx="1">
-            <a:schemeClr val="accent1"/>
-          </a:lnRef>
-          <a:fillRef idx="3">
-            <a:schemeClr val="accent1"/>
-          </a:fillRef>
-          <a:effectRef idx="2">
-            <a:schemeClr val="accent1"/>
-          </a:effectRef>
-          <a:fontRef idx="minor">
-            <a:schemeClr val="lt1"/>
-          </a:fontRef>
-        </p:style>
-        <p:txBody>
-          <a:bodyPr rtlCol="0" anchor="ctr"/>
-          <a:lstStyle/>
-          <a:p>
-            <a:pPr algn="ctr"/>
-            <a:endParaRPr/>
           </a:p>
         </p:txBody>
       </p:sp>
